--- a/reports/ATCO_Q3_2026/Earnings_Update_ATCO_Q32026.pptx
+++ b/reports/ATCO_Q3_2026/Earnings_Update_ATCO_Q32026.pptx
@@ -2405,7 +2405,7 @@
                 <a:ea typeface="Nunito" pitchFamily="34" charset="-122"/>
                 <a:cs typeface="Nunito" pitchFamily="34" charset="-120"/>
               </a:rPr>
-              <a:t>The quarter shows Atlas Copco running at two speeds. Vacuum Technique is riding the semiconductor investment cycle: organic orders up 82%, revenue up 28% and the margin up to 22.2% despite the cost of adding capacity. Compressor Technique, the largest and most profitable division, grew orders by only 6% and gave up 1.7 points of margin. Investors priced the second story, not the record order book, and sent the shares down 7.1% on the day.</a:t>
+              <a:t>Atlas Copco now runs at two speeds. Vacuum Technique is riding the semiconductor investment cycle: organic orders up 82%, revenue up 28% and the margin up to 22.2% despite ramp-up costs. Compressor Technique, the profit engine, grew orders by only 6% and gave up 1.7 points of margin. The shares fell 7.1% on the day: the beat rested on vacuum orders partly pulled forward, compressor prices will lag cost inflation, and a crowded stock close to its record needed more.</a:t>
             </a:r>
             <a:endParaRPr lang="en-US" sz="870" dirty="0"/>
           </a:p>
